--- a/viewers/pptx/e2e/fixtures/text-layout.pptx
+++ b/viewers/pptx/e2e/fixtures/text-layout.pptx
@@ -548,7 +548,74 @@
       </p:sp>
       <p:sp>
         <p:nvSpPr>
-          <p:cNvPr id="6" name="LooseSpacing"/>
+          <p:cNvPr id="6" name="LinkedAndMaths"/>
+          <p:cNvSpPr txBox="1"/>
+          <p:nvPr/>
+        </p:nvSpPr>
+        <p:spPr>
+          <a:xfrm>
+            <a:off x="457200" y="4754880"/>
+            <a:ext cx="5486400" cy="1097280"/>
+          </a:xfrm>
+          <a:prstGeom prst="rect">
+            <a:avLst/>
+          </a:prstGeom>
+          <a:noFill/>
+        </p:spPr>
+        <p:txBody>
+          <a:bodyPr wrap="square">
+            <a:noAutofit/>
+          </a:bodyPr>
+          <a:lstStyle/>
+          <a:p>
+            <a:r>
+              <a:rPr lang="en-US" sz="1400" dirty="0">
+                <a:latin typeface="Arial"/>
+                <a:cs typeface="Arial"/>
+              </a:rPr>
+              <a:t>See </a:t>
+            </a:r>
+            <a:r>
+              <a:rPr lang="en-US" sz="1400" dirty="0">
+                <a:hlinkClick xmlns:r="http://schemas.openxmlformats.org/officeDocument/2006/relationships" r:id="rIdHlink1" tooltip="Documentation"/>
+                <a:latin typeface="Arial"/>
+              </a:rPr>
+              <a:t>the docs</a:t>
+            </a:r>
+            <a:r>
+              <a:rPr lang="en-US" sz="1400" dirty="0">
+                <a:latin typeface="Arial"/>
+                <a:cs typeface="Arial"/>
+              </a:rPr>
+              <a:t> for more</a:t>
+            </a:r>
+          </a:p>
+          <a:p>
+            <a:r>
+              <a:rPr lang="en-US" sz="1400" dirty="0">
+                <a:latin typeface="Arial"/>
+                <a:cs typeface="Arial"/>
+              </a:rPr>
+              <a:t>Given </a:t>
+            </a:r>
+            <m:oMath xmlns:m="http://schemas.openxmlformats.org/officeDocument/2006/math">
+              <m:r>
+                <m:t>x</m:t>
+              </m:r>
+            </m:oMath>
+            <a:r>
+              <a:rPr lang="en-US" sz="1400" dirty="0">
+                <a:latin typeface="Arial"/>
+                <a:cs typeface="Arial"/>
+              </a:rPr>
+              <a:t> holds</a:t>
+            </a:r>
+          </a:p>
+        </p:txBody>
+      </p:sp>
+      <p:sp>
+        <p:nvSpPr>
+          <p:cNvPr id="7" name="LooseSpacing"/>
           <p:cNvSpPr txBox="1"/>
           <p:nvPr/>
         </p:nvSpPr>

--- a/viewers/pptx/e2e/fixtures/text-layout.pptx
+++ b/viewers/pptx/e2e/fixtures/text-layout.pptx
@@ -362,7 +362,7 @@
           <a:spcPct val="20000"/>
         </a:spcBef>
         <a:buFont typeface="Arial" panose="020B0604020202020204" pitchFamily="34" charset="0"/>
-        <a:buChar char="&amp;#x2022;"/>
+        <a:buChar char="•"/>
         <a:defRPr sz="3200" kern="1200">
           <a:solidFill>
             <a:schemeClr val="tx1"/>
